--- a/安靜_約書亞樂團version.pptx
+++ b/安靜_約書亞樂團version.pptx
@@ -167,10 +167,9 @@
           <a:lstStyle/>
           <a:p>
             <a:r>
-              <a:rPr lang="zh-TW" altLang="en-US" smtClean="0"/>
+              <a:rPr lang="zh-TW" altLang="en-US"/>
               <a:t>按一下以編輯母片標題樣式</a:t>
             </a:r>
-            <a:endParaRPr lang="zh-TW" altLang="en-US"/>
           </a:p>
         </p:txBody>
       </p:sp>
@@ -286,10 +285,9 @@
           </a:lstStyle>
           <a:p>
             <a:r>
-              <a:rPr lang="zh-TW" altLang="en-US" smtClean="0"/>
+              <a:rPr lang="zh-TW" altLang="en-US"/>
               <a:t>按一下以編輯母片副標題樣式</a:t>
             </a:r>
-            <a:endParaRPr lang="zh-TW" altLang="en-US"/>
           </a:p>
         </p:txBody>
       </p:sp>
@@ -310,7 +308,7 @@
           <a:p>
             <a:fld id="{20568EC8-F891-4262-8618-380BC85BBFDD}" type="datetimeFigureOut">
               <a:rPr lang="zh-TW" altLang="en-US" smtClean="0"/>
-              <a:t>2020/12/26</a:t>
+              <a:t>2024/6/8</a:t>
             </a:fld>
             <a:endParaRPr lang="zh-TW" altLang="en-US"/>
           </a:p>
@@ -399,10 +397,9 @@
           <a:lstStyle/>
           <a:p>
             <a:r>
-              <a:rPr lang="zh-TW" altLang="en-US" smtClean="0"/>
+              <a:rPr lang="zh-TW" altLang="en-US"/>
               <a:t>按一下以編輯母片標題樣式</a:t>
             </a:r>
-            <a:endParaRPr lang="zh-TW" altLang="en-US"/>
           </a:p>
         </p:txBody>
       </p:sp>
@@ -423,38 +420,37 @@
           <a:p>
             <a:pPr lvl="0"/>
             <a:r>
-              <a:rPr lang="zh-TW" altLang="en-US" smtClean="0"/>
+              <a:rPr lang="zh-TW" altLang="en-US"/>
               <a:t>按一下以編輯母片文字樣式</a:t>
             </a:r>
           </a:p>
           <a:p>
             <a:pPr lvl="1"/>
             <a:r>
-              <a:rPr lang="zh-TW" altLang="en-US" smtClean="0"/>
+              <a:rPr lang="zh-TW" altLang="en-US"/>
               <a:t>第二層</a:t>
             </a:r>
           </a:p>
           <a:p>
             <a:pPr lvl="2"/>
             <a:r>
-              <a:rPr lang="zh-TW" altLang="en-US" smtClean="0"/>
+              <a:rPr lang="zh-TW" altLang="en-US"/>
               <a:t>第三層</a:t>
             </a:r>
           </a:p>
           <a:p>
             <a:pPr lvl="3"/>
             <a:r>
-              <a:rPr lang="zh-TW" altLang="en-US" smtClean="0"/>
+              <a:rPr lang="zh-TW" altLang="en-US"/>
               <a:t>第四層</a:t>
             </a:r>
           </a:p>
           <a:p>
             <a:pPr lvl="4"/>
             <a:r>
-              <a:rPr lang="zh-TW" altLang="en-US" smtClean="0"/>
+              <a:rPr lang="zh-TW" altLang="en-US"/>
               <a:t>第五層</a:t>
             </a:r>
-            <a:endParaRPr lang="zh-TW" altLang="en-US"/>
           </a:p>
         </p:txBody>
       </p:sp>
@@ -475,7 +471,7 @@
           <a:p>
             <a:fld id="{20568EC8-F891-4262-8618-380BC85BBFDD}" type="datetimeFigureOut">
               <a:rPr lang="zh-TW" altLang="en-US" smtClean="0"/>
-              <a:t>2020/12/26</a:t>
+              <a:t>2024/6/8</a:t>
             </a:fld>
             <a:endParaRPr lang="zh-TW" altLang="en-US"/>
           </a:p>
@@ -569,10 +565,9 @@
           <a:lstStyle/>
           <a:p>
             <a:r>
-              <a:rPr lang="zh-TW" altLang="en-US" smtClean="0"/>
+              <a:rPr lang="zh-TW" altLang="en-US"/>
               <a:t>按一下以編輯母片標題樣式</a:t>
             </a:r>
-            <a:endParaRPr lang="zh-TW" altLang="en-US"/>
           </a:p>
         </p:txBody>
       </p:sp>
@@ -598,38 +593,37 @@
           <a:p>
             <a:pPr lvl="0"/>
             <a:r>
-              <a:rPr lang="zh-TW" altLang="en-US" smtClean="0"/>
+              <a:rPr lang="zh-TW" altLang="en-US"/>
               <a:t>按一下以編輯母片文字樣式</a:t>
             </a:r>
           </a:p>
           <a:p>
             <a:pPr lvl="1"/>
             <a:r>
-              <a:rPr lang="zh-TW" altLang="en-US" smtClean="0"/>
+              <a:rPr lang="zh-TW" altLang="en-US"/>
               <a:t>第二層</a:t>
             </a:r>
           </a:p>
           <a:p>
             <a:pPr lvl="2"/>
             <a:r>
-              <a:rPr lang="zh-TW" altLang="en-US" smtClean="0"/>
+              <a:rPr lang="zh-TW" altLang="en-US"/>
               <a:t>第三層</a:t>
             </a:r>
           </a:p>
           <a:p>
             <a:pPr lvl="3"/>
             <a:r>
-              <a:rPr lang="zh-TW" altLang="en-US" smtClean="0"/>
+              <a:rPr lang="zh-TW" altLang="en-US"/>
               <a:t>第四層</a:t>
             </a:r>
           </a:p>
           <a:p>
             <a:pPr lvl="4"/>
             <a:r>
-              <a:rPr lang="zh-TW" altLang="en-US" smtClean="0"/>
+              <a:rPr lang="zh-TW" altLang="en-US"/>
               <a:t>第五層</a:t>
             </a:r>
-            <a:endParaRPr lang="zh-TW" altLang="en-US"/>
           </a:p>
         </p:txBody>
       </p:sp>
@@ -650,7 +644,7 @@
           <a:p>
             <a:fld id="{20568EC8-F891-4262-8618-380BC85BBFDD}" type="datetimeFigureOut">
               <a:rPr lang="zh-TW" altLang="en-US" smtClean="0"/>
-              <a:t>2020/12/26</a:t>
+              <a:t>2024/6/8</a:t>
             </a:fld>
             <a:endParaRPr lang="zh-TW" altLang="en-US"/>
           </a:p>
@@ -739,10 +733,9 @@
           <a:lstStyle/>
           <a:p>
             <a:r>
-              <a:rPr lang="zh-TW" altLang="en-US" smtClean="0"/>
+              <a:rPr lang="zh-TW" altLang="en-US"/>
               <a:t>按一下以編輯母片標題樣式</a:t>
             </a:r>
-            <a:endParaRPr lang="zh-TW" altLang="en-US"/>
           </a:p>
         </p:txBody>
       </p:sp>
@@ -763,38 +756,37 @@
           <a:p>
             <a:pPr lvl="0"/>
             <a:r>
-              <a:rPr lang="zh-TW" altLang="en-US" smtClean="0"/>
+              <a:rPr lang="zh-TW" altLang="en-US"/>
               <a:t>按一下以編輯母片文字樣式</a:t>
             </a:r>
           </a:p>
           <a:p>
             <a:pPr lvl="1"/>
             <a:r>
-              <a:rPr lang="zh-TW" altLang="en-US" smtClean="0"/>
+              <a:rPr lang="zh-TW" altLang="en-US"/>
               <a:t>第二層</a:t>
             </a:r>
           </a:p>
           <a:p>
             <a:pPr lvl="2"/>
             <a:r>
-              <a:rPr lang="zh-TW" altLang="en-US" smtClean="0"/>
+              <a:rPr lang="zh-TW" altLang="en-US"/>
               <a:t>第三層</a:t>
             </a:r>
           </a:p>
           <a:p>
             <a:pPr lvl="3"/>
             <a:r>
-              <a:rPr lang="zh-TW" altLang="en-US" smtClean="0"/>
+              <a:rPr lang="zh-TW" altLang="en-US"/>
               <a:t>第四層</a:t>
             </a:r>
           </a:p>
           <a:p>
             <a:pPr lvl="4"/>
             <a:r>
-              <a:rPr lang="zh-TW" altLang="en-US" smtClean="0"/>
+              <a:rPr lang="zh-TW" altLang="en-US"/>
               <a:t>第五層</a:t>
             </a:r>
-            <a:endParaRPr lang="zh-TW" altLang="en-US"/>
           </a:p>
         </p:txBody>
       </p:sp>
@@ -815,7 +807,7 @@
           <a:p>
             <a:fld id="{20568EC8-F891-4262-8618-380BC85BBFDD}" type="datetimeFigureOut">
               <a:rPr lang="zh-TW" altLang="en-US" smtClean="0"/>
-              <a:t>2020/12/26</a:t>
+              <a:t>2024/6/8</a:t>
             </a:fld>
             <a:endParaRPr lang="zh-TW" altLang="en-US"/>
           </a:p>
@@ -913,10 +905,9 @@
           </a:lstStyle>
           <a:p>
             <a:r>
-              <a:rPr lang="zh-TW" altLang="en-US" smtClean="0"/>
+              <a:rPr lang="zh-TW" altLang="en-US"/>
               <a:t>按一下以編輯母片標題樣式</a:t>
             </a:r>
-            <a:endParaRPr lang="zh-TW" altLang="en-US"/>
           </a:p>
         </p:txBody>
       </p:sp>
@@ -1033,7 +1024,7 @@
           <a:p>
             <a:pPr lvl="0"/>
             <a:r>
-              <a:rPr lang="zh-TW" altLang="en-US" smtClean="0"/>
+              <a:rPr lang="zh-TW" altLang="en-US"/>
               <a:t>按一下以編輯母片文字樣式</a:t>
             </a:r>
           </a:p>
@@ -1056,7 +1047,7 @@
           <a:p>
             <a:fld id="{20568EC8-F891-4262-8618-380BC85BBFDD}" type="datetimeFigureOut">
               <a:rPr lang="zh-TW" altLang="en-US" smtClean="0"/>
-              <a:t>2020/12/26</a:t>
+              <a:t>2024/6/8</a:t>
             </a:fld>
             <a:endParaRPr lang="zh-TW" altLang="en-US"/>
           </a:p>
@@ -1145,10 +1136,9 @@
           <a:lstStyle/>
           <a:p>
             <a:r>
-              <a:rPr lang="zh-TW" altLang="en-US" smtClean="0"/>
+              <a:rPr lang="zh-TW" altLang="en-US"/>
               <a:t>按一下以編輯母片標題樣式</a:t>
             </a:r>
-            <a:endParaRPr lang="zh-TW" altLang="en-US"/>
           </a:p>
         </p:txBody>
       </p:sp>
@@ -1202,38 +1192,37 @@
           <a:p>
             <a:pPr lvl="0"/>
             <a:r>
-              <a:rPr lang="zh-TW" altLang="en-US" smtClean="0"/>
+              <a:rPr lang="zh-TW" altLang="en-US"/>
               <a:t>按一下以編輯母片文字樣式</a:t>
             </a:r>
           </a:p>
           <a:p>
             <a:pPr lvl="1"/>
             <a:r>
-              <a:rPr lang="zh-TW" altLang="en-US" smtClean="0"/>
+              <a:rPr lang="zh-TW" altLang="en-US"/>
               <a:t>第二層</a:t>
             </a:r>
           </a:p>
           <a:p>
             <a:pPr lvl="2"/>
             <a:r>
-              <a:rPr lang="zh-TW" altLang="en-US" smtClean="0"/>
+              <a:rPr lang="zh-TW" altLang="en-US"/>
               <a:t>第三層</a:t>
             </a:r>
           </a:p>
           <a:p>
             <a:pPr lvl="3"/>
             <a:r>
-              <a:rPr lang="zh-TW" altLang="en-US" smtClean="0"/>
+              <a:rPr lang="zh-TW" altLang="en-US"/>
               <a:t>第四層</a:t>
             </a:r>
           </a:p>
           <a:p>
             <a:pPr lvl="4"/>
             <a:r>
-              <a:rPr lang="zh-TW" altLang="en-US" smtClean="0"/>
+              <a:rPr lang="zh-TW" altLang="en-US"/>
               <a:t>第五層</a:t>
             </a:r>
-            <a:endParaRPr lang="zh-TW" altLang="en-US"/>
           </a:p>
         </p:txBody>
       </p:sp>
@@ -1287,38 +1276,37 @@
           <a:p>
             <a:pPr lvl="0"/>
             <a:r>
-              <a:rPr lang="zh-TW" altLang="en-US" smtClean="0"/>
+              <a:rPr lang="zh-TW" altLang="en-US"/>
               <a:t>按一下以編輯母片文字樣式</a:t>
             </a:r>
           </a:p>
           <a:p>
             <a:pPr lvl="1"/>
             <a:r>
-              <a:rPr lang="zh-TW" altLang="en-US" smtClean="0"/>
+              <a:rPr lang="zh-TW" altLang="en-US"/>
               <a:t>第二層</a:t>
             </a:r>
           </a:p>
           <a:p>
             <a:pPr lvl="2"/>
             <a:r>
-              <a:rPr lang="zh-TW" altLang="en-US" smtClean="0"/>
+              <a:rPr lang="zh-TW" altLang="en-US"/>
               <a:t>第三層</a:t>
             </a:r>
           </a:p>
           <a:p>
             <a:pPr lvl="3"/>
             <a:r>
-              <a:rPr lang="zh-TW" altLang="en-US" smtClean="0"/>
+              <a:rPr lang="zh-TW" altLang="en-US"/>
               <a:t>第四層</a:t>
             </a:r>
           </a:p>
           <a:p>
             <a:pPr lvl="4"/>
             <a:r>
-              <a:rPr lang="zh-TW" altLang="en-US" smtClean="0"/>
+              <a:rPr lang="zh-TW" altLang="en-US"/>
               <a:t>第五層</a:t>
             </a:r>
-            <a:endParaRPr lang="zh-TW" altLang="en-US"/>
           </a:p>
         </p:txBody>
       </p:sp>
@@ -1339,7 +1327,7 @@
           <a:p>
             <a:fld id="{20568EC8-F891-4262-8618-380BC85BBFDD}" type="datetimeFigureOut">
               <a:rPr lang="zh-TW" altLang="en-US" smtClean="0"/>
-              <a:t>2020/12/26</a:t>
+              <a:t>2024/6/8</a:t>
             </a:fld>
             <a:endParaRPr lang="zh-TW" altLang="en-US"/>
           </a:p>
@@ -1432,10 +1420,9 @@
           </a:lstStyle>
           <a:p>
             <a:r>
-              <a:rPr lang="zh-TW" altLang="en-US" smtClean="0"/>
+              <a:rPr lang="zh-TW" altLang="en-US"/>
               <a:t>按一下以編輯母片標題樣式</a:t>
             </a:r>
-            <a:endParaRPr lang="zh-TW" altLang="en-US"/>
           </a:p>
         </p:txBody>
       </p:sp>
@@ -1498,7 +1485,7 @@
           <a:p>
             <a:pPr lvl="0"/>
             <a:r>
-              <a:rPr lang="zh-TW" altLang="en-US" smtClean="0"/>
+              <a:rPr lang="zh-TW" altLang="en-US"/>
               <a:t>按一下以編輯母片文字樣式</a:t>
             </a:r>
           </a:p>
@@ -1554,38 +1541,37 @@
           <a:p>
             <a:pPr lvl="0"/>
             <a:r>
-              <a:rPr lang="zh-TW" altLang="en-US" smtClean="0"/>
+              <a:rPr lang="zh-TW" altLang="en-US"/>
               <a:t>按一下以編輯母片文字樣式</a:t>
             </a:r>
           </a:p>
           <a:p>
             <a:pPr lvl="1"/>
             <a:r>
-              <a:rPr lang="zh-TW" altLang="en-US" smtClean="0"/>
+              <a:rPr lang="zh-TW" altLang="en-US"/>
               <a:t>第二層</a:t>
             </a:r>
           </a:p>
           <a:p>
             <a:pPr lvl="2"/>
             <a:r>
-              <a:rPr lang="zh-TW" altLang="en-US" smtClean="0"/>
+              <a:rPr lang="zh-TW" altLang="en-US"/>
               <a:t>第三層</a:t>
             </a:r>
           </a:p>
           <a:p>
             <a:pPr lvl="3"/>
             <a:r>
-              <a:rPr lang="zh-TW" altLang="en-US" smtClean="0"/>
+              <a:rPr lang="zh-TW" altLang="en-US"/>
               <a:t>第四層</a:t>
             </a:r>
           </a:p>
           <a:p>
             <a:pPr lvl="4"/>
             <a:r>
-              <a:rPr lang="zh-TW" altLang="en-US" smtClean="0"/>
+              <a:rPr lang="zh-TW" altLang="en-US"/>
               <a:t>第五層</a:t>
             </a:r>
-            <a:endParaRPr lang="zh-TW" altLang="en-US"/>
           </a:p>
         </p:txBody>
       </p:sp>
@@ -1648,7 +1634,7 @@
           <a:p>
             <a:pPr lvl="0"/>
             <a:r>
-              <a:rPr lang="zh-TW" altLang="en-US" smtClean="0"/>
+              <a:rPr lang="zh-TW" altLang="en-US"/>
               <a:t>按一下以編輯母片文字樣式</a:t>
             </a:r>
           </a:p>
@@ -1704,38 +1690,37 @@
           <a:p>
             <a:pPr lvl="0"/>
             <a:r>
-              <a:rPr lang="zh-TW" altLang="en-US" smtClean="0"/>
+              <a:rPr lang="zh-TW" altLang="en-US"/>
               <a:t>按一下以編輯母片文字樣式</a:t>
             </a:r>
           </a:p>
           <a:p>
             <a:pPr lvl="1"/>
             <a:r>
-              <a:rPr lang="zh-TW" altLang="en-US" smtClean="0"/>
+              <a:rPr lang="zh-TW" altLang="en-US"/>
               <a:t>第二層</a:t>
             </a:r>
           </a:p>
           <a:p>
             <a:pPr lvl="2"/>
             <a:r>
-              <a:rPr lang="zh-TW" altLang="en-US" smtClean="0"/>
+              <a:rPr lang="zh-TW" altLang="en-US"/>
               <a:t>第三層</a:t>
             </a:r>
           </a:p>
           <a:p>
             <a:pPr lvl="3"/>
             <a:r>
-              <a:rPr lang="zh-TW" altLang="en-US" smtClean="0"/>
+              <a:rPr lang="zh-TW" altLang="en-US"/>
               <a:t>第四層</a:t>
             </a:r>
           </a:p>
           <a:p>
             <a:pPr lvl="4"/>
             <a:r>
-              <a:rPr lang="zh-TW" altLang="en-US" smtClean="0"/>
+              <a:rPr lang="zh-TW" altLang="en-US"/>
               <a:t>第五層</a:t>
             </a:r>
-            <a:endParaRPr lang="zh-TW" altLang="en-US"/>
           </a:p>
         </p:txBody>
       </p:sp>
@@ -1756,7 +1741,7 @@
           <a:p>
             <a:fld id="{20568EC8-F891-4262-8618-380BC85BBFDD}" type="datetimeFigureOut">
               <a:rPr lang="zh-TW" altLang="en-US" smtClean="0"/>
-              <a:t>2020/12/26</a:t>
+              <a:t>2024/6/8</a:t>
             </a:fld>
             <a:endParaRPr lang="zh-TW" altLang="en-US"/>
           </a:p>
@@ -1845,10 +1830,9 @@
           <a:lstStyle/>
           <a:p>
             <a:r>
-              <a:rPr lang="zh-TW" altLang="en-US" smtClean="0"/>
+              <a:rPr lang="zh-TW" altLang="en-US"/>
               <a:t>按一下以編輯母片標題樣式</a:t>
             </a:r>
-            <a:endParaRPr lang="zh-TW" altLang="en-US"/>
           </a:p>
         </p:txBody>
       </p:sp>
@@ -1869,7 +1853,7 @@
           <a:p>
             <a:fld id="{20568EC8-F891-4262-8618-380BC85BBFDD}" type="datetimeFigureOut">
               <a:rPr lang="zh-TW" altLang="en-US" smtClean="0"/>
-              <a:t>2020/12/26</a:t>
+              <a:t>2024/6/8</a:t>
             </a:fld>
             <a:endParaRPr lang="zh-TW" altLang="en-US"/>
           </a:p>
@@ -1959,7 +1943,7 @@
           <a:p>
             <a:fld id="{20568EC8-F891-4262-8618-380BC85BBFDD}" type="datetimeFigureOut">
               <a:rPr lang="zh-TW" altLang="en-US" smtClean="0"/>
-              <a:t>2020/12/26</a:t>
+              <a:t>2024/6/8</a:t>
             </a:fld>
             <a:endParaRPr lang="zh-TW" altLang="en-US"/>
           </a:p>
@@ -2057,10 +2041,9 @@
           </a:lstStyle>
           <a:p>
             <a:r>
-              <a:rPr lang="zh-TW" altLang="en-US" smtClean="0"/>
+              <a:rPr lang="zh-TW" altLang="en-US"/>
               <a:t>按一下以編輯母片標題樣式</a:t>
             </a:r>
-            <a:endParaRPr lang="zh-TW" altLang="en-US"/>
           </a:p>
         </p:txBody>
       </p:sp>
@@ -2114,38 +2097,37 @@
           <a:p>
             <a:pPr lvl="0"/>
             <a:r>
-              <a:rPr lang="zh-TW" altLang="en-US" smtClean="0"/>
+              <a:rPr lang="zh-TW" altLang="en-US"/>
               <a:t>按一下以編輯母片文字樣式</a:t>
             </a:r>
           </a:p>
           <a:p>
             <a:pPr lvl="1"/>
             <a:r>
-              <a:rPr lang="zh-TW" altLang="en-US" smtClean="0"/>
+              <a:rPr lang="zh-TW" altLang="en-US"/>
               <a:t>第二層</a:t>
             </a:r>
           </a:p>
           <a:p>
             <a:pPr lvl="2"/>
             <a:r>
-              <a:rPr lang="zh-TW" altLang="en-US" smtClean="0"/>
+              <a:rPr lang="zh-TW" altLang="en-US"/>
               <a:t>第三層</a:t>
             </a:r>
           </a:p>
           <a:p>
             <a:pPr lvl="3"/>
             <a:r>
-              <a:rPr lang="zh-TW" altLang="en-US" smtClean="0"/>
+              <a:rPr lang="zh-TW" altLang="en-US"/>
               <a:t>第四層</a:t>
             </a:r>
           </a:p>
           <a:p>
             <a:pPr lvl="4"/>
             <a:r>
-              <a:rPr lang="zh-TW" altLang="en-US" smtClean="0"/>
+              <a:rPr lang="zh-TW" altLang="en-US"/>
               <a:t>第五層</a:t>
             </a:r>
-            <a:endParaRPr lang="zh-TW" altLang="en-US"/>
           </a:p>
         </p:txBody>
       </p:sp>
@@ -2208,7 +2190,7 @@
           <a:p>
             <a:pPr lvl="0"/>
             <a:r>
-              <a:rPr lang="zh-TW" altLang="en-US" smtClean="0"/>
+              <a:rPr lang="zh-TW" altLang="en-US"/>
               <a:t>按一下以編輯母片文字樣式</a:t>
             </a:r>
           </a:p>
@@ -2231,7 +2213,7 @@
           <a:p>
             <a:fld id="{20568EC8-F891-4262-8618-380BC85BBFDD}" type="datetimeFigureOut">
               <a:rPr lang="zh-TW" altLang="en-US" smtClean="0"/>
-              <a:t>2020/12/26</a:t>
+              <a:t>2024/6/8</a:t>
             </a:fld>
             <a:endParaRPr lang="zh-TW" altLang="en-US"/>
           </a:p>
@@ -2329,10 +2311,9 @@
           </a:lstStyle>
           <a:p>
             <a:r>
-              <a:rPr lang="zh-TW" altLang="en-US" smtClean="0"/>
+              <a:rPr lang="zh-TW" altLang="en-US"/>
               <a:t>按一下以編輯母片標題樣式</a:t>
             </a:r>
-            <a:endParaRPr lang="zh-TW" altLang="en-US"/>
           </a:p>
         </p:txBody>
       </p:sp>
@@ -2394,10 +2375,9 @@
           </a:lstStyle>
           <a:p>
             <a:r>
-              <a:rPr lang="zh-TW" altLang="en-US" smtClean="0"/>
+              <a:rPr lang="zh-TW" altLang="en-US"/>
               <a:t>按一下圖示以新增圖片</a:t>
             </a:r>
-            <a:endParaRPr lang="zh-TW" altLang="en-US"/>
           </a:p>
         </p:txBody>
       </p:sp>
@@ -2460,7 +2440,7 @@
           <a:p>
             <a:pPr lvl="0"/>
             <a:r>
-              <a:rPr lang="zh-TW" altLang="en-US" smtClean="0"/>
+              <a:rPr lang="zh-TW" altLang="en-US"/>
               <a:t>按一下以編輯母片文字樣式</a:t>
             </a:r>
           </a:p>
@@ -2483,7 +2463,7 @@
           <a:p>
             <a:fld id="{20568EC8-F891-4262-8618-380BC85BBFDD}" type="datetimeFigureOut">
               <a:rPr lang="zh-TW" altLang="en-US" smtClean="0"/>
-              <a:t>2020/12/26</a:t>
+              <a:t>2024/6/8</a:t>
             </a:fld>
             <a:endParaRPr lang="zh-TW" altLang="en-US"/>
           </a:p>
@@ -2592,10 +2572,9 @@
           <a:lstStyle/>
           <a:p>
             <a:r>
-              <a:rPr lang="zh-TW" altLang="en-US" smtClean="0"/>
+              <a:rPr lang="zh-TW" altLang="en-US"/>
               <a:t>按一下以編輯母片標題樣式</a:t>
             </a:r>
-            <a:endParaRPr lang="zh-TW" altLang="en-US"/>
           </a:p>
         </p:txBody>
       </p:sp>
@@ -2626,38 +2605,37 @@
           <a:p>
             <a:pPr lvl="0"/>
             <a:r>
-              <a:rPr lang="zh-TW" altLang="en-US" smtClean="0"/>
+              <a:rPr lang="zh-TW" altLang="en-US"/>
               <a:t>按一下以編輯母片文字樣式</a:t>
             </a:r>
           </a:p>
           <a:p>
             <a:pPr lvl="1"/>
             <a:r>
-              <a:rPr lang="zh-TW" altLang="en-US" smtClean="0"/>
+              <a:rPr lang="zh-TW" altLang="en-US"/>
               <a:t>第二層</a:t>
             </a:r>
           </a:p>
           <a:p>
             <a:pPr lvl="2"/>
             <a:r>
-              <a:rPr lang="zh-TW" altLang="en-US" smtClean="0"/>
+              <a:rPr lang="zh-TW" altLang="en-US"/>
               <a:t>第三層</a:t>
             </a:r>
           </a:p>
           <a:p>
             <a:pPr lvl="3"/>
             <a:r>
-              <a:rPr lang="zh-TW" altLang="en-US" smtClean="0"/>
+              <a:rPr lang="zh-TW" altLang="en-US"/>
               <a:t>第四層</a:t>
             </a:r>
           </a:p>
           <a:p>
             <a:pPr lvl="4"/>
             <a:r>
-              <a:rPr lang="zh-TW" altLang="en-US" smtClean="0"/>
+              <a:rPr lang="zh-TW" altLang="en-US"/>
               <a:t>第五層</a:t>
             </a:r>
-            <a:endParaRPr lang="zh-TW" altLang="en-US"/>
           </a:p>
         </p:txBody>
       </p:sp>
@@ -2696,7 +2674,7 @@
           <a:p>
             <a:fld id="{20568EC8-F891-4262-8618-380BC85BBFDD}" type="datetimeFigureOut">
               <a:rPr lang="zh-TW" altLang="en-US" smtClean="0"/>
-              <a:t>2020/12/26</a:t>
+              <a:t>2024/6/8</a:t>
             </a:fld>
             <a:endParaRPr lang="zh-TW" altLang="en-US"/>
           </a:p>
@@ -3089,7 +3067,7 @@
           <a:lstStyle/>
           <a:p>
             <a:r>
-              <a:rPr lang="zh-CN" altLang="en-US" sz="5400" b="1" i="1" dirty="0" smtClean="0">
+              <a:rPr lang="zh-CN" altLang="en-US" sz="5400" b="1" i="1" dirty="0">
                 <a:solidFill>
                   <a:srgbClr val="000066"/>
                 </a:solidFill>
@@ -3103,24 +3081,7 @@
                 <a:latin typeface="微軟正黑體" pitchFamily="34" charset="-120"/>
                 <a:ea typeface="微軟正黑體" pitchFamily="34" charset="-120"/>
               </a:rPr>
-              <a:t>安</a:t>
-            </a:r>
-            <a:r>
-              <a:rPr lang="zh-CN" altLang="en-US" sz="5400" b="1" i="1" dirty="0">
-                <a:solidFill>
-                  <a:srgbClr val="000066"/>
-                </a:solidFill>
-                <a:effectLst>
-                  <a:outerShdw blurRad="38100" dist="38100" dir="2700000" algn="tl">
-                    <a:srgbClr val="000000">
-                      <a:alpha val="43137"/>
-                    </a:srgbClr>
-                  </a:outerShdw>
-                </a:effectLst>
-                <a:latin typeface="微軟正黑體" pitchFamily="34" charset="-120"/>
-                <a:ea typeface="微軟正黑體" pitchFamily="34" charset="-120"/>
-              </a:rPr>
-              <a:t>靜</a:t>
+              <a:t>安靜</a:t>
             </a:r>
             <a:endParaRPr lang="zh-TW" altLang="en-US" sz="5400" b="1" i="1" dirty="0">
               <a:solidFill>
@@ -3149,13 +3110,6 @@
   <p:clrMapOvr>
     <a:masterClrMapping/>
   </p:clrMapOvr>
-  <p:timing>
-    <p:tnLst>
-      <p:par>
-        <p:cTn id="1" dur="indefinite" restart="never" nodeType="tmRoot"/>
-      </p:par>
-    </p:tnLst>
-  </p:timing>
 </p:sld>
 </file>
 
@@ -3209,27 +3163,7 @@
                 <a:latin typeface="微軟正黑體" pitchFamily="34" charset="-120"/>
                 <a:ea typeface="微軟正黑體" pitchFamily="34" charset="-120"/>
               </a:rPr>
-              <a:t>藏我</a:t>
-            </a:r>
-            <a:r>
-              <a:rPr lang="zh-TW" altLang="en-US" sz="4800" b="1" dirty="0" smtClean="0">
-                <a:solidFill>
-                  <a:srgbClr val="000066"/>
-                </a:solidFill>
-                <a:latin typeface="微軟正黑體" pitchFamily="34" charset="-120"/>
-                <a:ea typeface="微軟正黑體" pitchFamily="34" charset="-120"/>
-              </a:rPr>
-              <a:t>在  </a:t>
-            </a:r>
-            <a:r>
-              <a:rPr lang="zh-TW" altLang="en-US" sz="4800" b="1" dirty="0">
-                <a:solidFill>
-                  <a:srgbClr val="000066"/>
-                </a:solidFill>
-                <a:latin typeface="微軟正黑體" pitchFamily="34" charset="-120"/>
-                <a:ea typeface="微軟正黑體" pitchFamily="34" charset="-120"/>
-              </a:rPr>
-              <a:t>翅膀蔭下</a:t>
+              <a:t>藏我在  翅膀蔭下</a:t>
             </a:r>
             <a:endParaRPr lang="en-US" altLang="zh-TW" sz="4800" b="1" dirty="0">
               <a:solidFill>
@@ -3254,7 +3188,7 @@
               <a:t>遮蓋我 </a:t>
             </a:r>
             <a:r>
-              <a:rPr lang="en-US" altLang="zh-TW" sz="4800" b="1" dirty="0" smtClean="0">
+              <a:rPr lang="en-US" altLang="zh-TW" sz="4800" b="1" dirty="0">
                 <a:solidFill>
                   <a:srgbClr val="000066"/>
                 </a:solidFill>
@@ -3264,31 +3198,98 @@
               <a:t> </a:t>
             </a:r>
             <a:r>
-              <a:rPr lang="zh-TW" altLang="en-US" sz="4800" b="1" dirty="0" smtClean="0">
+              <a:rPr lang="zh-TW" altLang="en-US" sz="4800" b="1" dirty="0">
                 <a:solidFill>
                   <a:srgbClr val="000066"/>
                 </a:solidFill>
                 <a:latin typeface="微軟正黑體" pitchFamily="34" charset="-120"/>
                 <a:ea typeface="微軟正黑體" pitchFamily="34" charset="-120"/>
               </a:rPr>
-              <a:t>在</a:t>
-            </a:r>
-            <a:r>
-              <a:rPr lang="zh-TW" altLang="en-US" sz="4800" b="1" dirty="0">
+              <a:t>在祢大能手中</a:t>
+            </a:r>
+          </a:p>
+        </p:txBody>
+      </p:sp>
+      <p:sp>
+        <p:nvSpPr>
+          <p:cNvPr id="2" name="TextBox 1">
+            <a:extLst>
+              <a:ext uri="{FF2B5EF4-FFF2-40B4-BE49-F238E27FC236}">
+                <a16:creationId xmlns:a16="http://schemas.microsoft.com/office/drawing/2014/main" id="{6E3501D5-820B-FB0F-D11A-D270CEC698B9}"/>
+              </a:ext>
+            </a:extLst>
+          </p:cNvPr>
+          <p:cNvSpPr txBox="1"/>
+          <p:nvPr/>
+        </p:nvSpPr>
+        <p:spPr>
+          <a:xfrm>
+            <a:off x="0" y="3867894"/>
+            <a:ext cx="9144000" cy="523220"/>
+          </a:xfrm>
+          <a:prstGeom prst="rect">
+            <a:avLst/>
+          </a:prstGeom>
+          <a:noFill/>
+        </p:spPr>
+        <p:txBody>
+          <a:bodyPr wrap="square" rtlCol="0">
+            <a:spAutoFit/>
+          </a:bodyPr>
+          <a:lstStyle/>
+          <a:p>
+            <a:pPr algn="ctr"/>
+            <a:r>
+              <a:rPr lang="en-US" sz="2800" b="1" dirty="0">
                 <a:solidFill>
                   <a:srgbClr val="000066"/>
                 </a:solidFill>
-                <a:latin typeface="微軟正黑體" pitchFamily="34" charset="-120"/>
-                <a:ea typeface="微軟正黑體" pitchFamily="34" charset="-120"/>
+                <a:effectLst/>
+                <a:latin typeface="Microsoft JhengHei" panose="020B0604030504040204" pitchFamily="34" charset="-120"/>
+                <a:ea typeface="Microsoft JhengHei" panose="020B0604030504040204" pitchFamily="34" charset="-120"/>
               </a:rPr>
-              <a:t>祢大能手中</a:t>
-            </a:r>
-            <a:endParaRPr lang="zh-TW" altLang="en-US" sz="4800" b="1" dirty="0">
+              <a:t>( </a:t>
+            </a:r>
+            <a:r>
+              <a:rPr lang="zh-CN" altLang="en-US" sz="2800" b="1" dirty="0">
+                <a:solidFill>
+                  <a:srgbClr val="000066"/>
+                </a:solidFill>
+                <a:effectLst/>
+                <a:latin typeface="Microsoft JhengHei" panose="020B0604030504040204" pitchFamily="34" charset="-120"/>
+                <a:ea typeface="Microsoft JhengHei" panose="020B0604030504040204" pitchFamily="34" charset="-120"/>
+              </a:rPr>
+              <a:t>正歌 </a:t>
+            </a:r>
+            <a:r>
+              <a:rPr lang="en-US" altLang="zh-CN" sz="2800" b="1" dirty="0">
+                <a:solidFill>
+                  <a:srgbClr val="000066"/>
+                </a:solidFill>
+                <a:effectLst/>
+                <a:latin typeface="Microsoft JhengHei" panose="020B0604030504040204" pitchFamily="34" charset="-120"/>
+                <a:ea typeface="Microsoft JhengHei" panose="020B0604030504040204" pitchFamily="34" charset="-120"/>
+              </a:rPr>
+              <a:t>1</a:t>
+            </a:r>
+            <a:r>
+              <a:rPr lang="en-US" sz="2800" b="1" dirty="0">
+                <a:solidFill>
+                  <a:srgbClr val="000066"/>
+                </a:solidFill>
+                <a:effectLst/>
+                <a:latin typeface="Microsoft JhengHei" panose="020B0604030504040204" pitchFamily="34" charset="-120"/>
+                <a:ea typeface="Microsoft JhengHei" panose="020B0604030504040204" pitchFamily="34" charset="-120"/>
+              </a:rPr>
+              <a:t> )</a:t>
+            </a:r>
+            <a:endParaRPr lang="vi-VN" sz="2800" b="1" dirty="0">
               <a:solidFill>
                 <a:srgbClr val="000066"/>
               </a:solidFill>
-              <a:latin typeface="微軟正黑體" pitchFamily="34" charset="-120"/>
-              <a:ea typeface="微軟正黑體" pitchFamily="34" charset="-120"/>
+              <a:effectLst/>
+              <a:latin typeface="Microsoft JhengHei" panose="020B0604030504040204" pitchFamily="34" charset="-120"/>
+              <a:ea typeface="Microsoft JhengHei" panose="020B0604030504040204" pitchFamily="34" charset="-120"/>
             </a:endParaRPr>
           </a:p>
         </p:txBody>
@@ -3303,13 +3304,6 @@
   <p:clrMapOvr>
     <a:masterClrMapping/>
   </p:clrMapOvr>
-  <p:timing>
-    <p:tnLst>
-      <p:par>
-        <p:cTn id="1" dur="indefinite" restart="never" nodeType="tmRoot"/>
-      </p:par>
-    </p:tnLst>
-  </p:timing>
 </p:sld>
 </file>
 
@@ -3397,6 +3391,79 @@
           </a:p>
         </p:txBody>
       </p:sp>
+      <p:sp>
+        <p:nvSpPr>
+          <p:cNvPr id="2" name="TextBox 1">
+            <a:extLst>
+              <a:ext uri="{FF2B5EF4-FFF2-40B4-BE49-F238E27FC236}">
+                <a16:creationId xmlns:a16="http://schemas.microsoft.com/office/drawing/2014/main" id="{AD79FC61-A7E2-B893-F609-B084468A06A7}"/>
+              </a:ext>
+            </a:extLst>
+          </p:cNvPr>
+          <p:cNvSpPr txBox="1"/>
+          <p:nvPr/>
+        </p:nvSpPr>
+        <p:spPr>
+          <a:xfrm>
+            <a:off x="0" y="3867894"/>
+            <a:ext cx="9144000" cy="523220"/>
+          </a:xfrm>
+          <a:prstGeom prst="rect">
+            <a:avLst/>
+          </a:prstGeom>
+          <a:noFill/>
+        </p:spPr>
+        <p:txBody>
+          <a:bodyPr wrap="square" rtlCol="0">
+            <a:spAutoFit/>
+          </a:bodyPr>
+          <a:lstStyle/>
+          <a:p>
+            <a:pPr algn="ctr"/>
+            <a:r>
+              <a:rPr lang="en-US" sz="2800" b="1" dirty="0">
+                <a:solidFill>
+                  <a:srgbClr val="000066"/>
+                </a:solidFill>
+                <a:effectLst/>
+                <a:latin typeface="Microsoft JhengHei" panose="020B0604030504040204" pitchFamily="34" charset="-120"/>
+                <a:ea typeface="Microsoft JhengHei" panose="020B0604030504040204" pitchFamily="34" charset="-120"/>
+              </a:rPr>
+              <a:t>( </a:t>
+            </a:r>
+            <a:r>
+              <a:rPr lang="zh-CN" altLang="en-US" sz="2800" b="1" dirty="0">
+                <a:solidFill>
+                  <a:srgbClr val="000066"/>
+                </a:solidFill>
+                <a:effectLst/>
+                <a:latin typeface="Microsoft JhengHei" panose="020B0604030504040204" pitchFamily="34" charset="-120"/>
+                <a:ea typeface="Microsoft JhengHei" panose="020B0604030504040204" pitchFamily="34" charset="-120"/>
+              </a:rPr>
+              <a:t>副歌</a:t>
+            </a:r>
+            <a:r>
+              <a:rPr lang="en-US" sz="2800" b="1" dirty="0">
+                <a:solidFill>
+                  <a:srgbClr val="000066"/>
+                </a:solidFill>
+                <a:effectLst/>
+                <a:latin typeface="Microsoft JhengHei" panose="020B0604030504040204" pitchFamily="34" charset="-120"/>
+                <a:ea typeface="Microsoft JhengHei" panose="020B0604030504040204" pitchFamily="34" charset="-120"/>
+              </a:rPr>
+              <a:t> )</a:t>
+            </a:r>
+            <a:endParaRPr lang="vi-VN" sz="2800" b="1" dirty="0">
+              <a:solidFill>
+                <a:srgbClr val="000066"/>
+              </a:solidFill>
+              <a:effectLst/>
+              <a:latin typeface="Microsoft JhengHei" panose="020B0604030504040204" pitchFamily="34" charset="-120"/>
+              <a:ea typeface="Microsoft JhengHei" panose="020B0604030504040204" pitchFamily="34" charset="-120"/>
+            </a:endParaRPr>
+          </a:p>
+        </p:txBody>
+      </p:sp>
     </p:spTree>
     <p:extLst>
       <p:ext uri="{BB962C8B-B14F-4D97-AF65-F5344CB8AC3E}">
@@ -3407,13 +3474,6 @@
   <p:clrMapOvr>
     <a:masterClrMapping/>
   </p:clrMapOvr>
-  <p:timing>
-    <p:tnLst>
-      <p:par>
-        <p:cTn id="1" dur="indefinite" restart="never" nodeType="tmRoot"/>
-      </p:par>
-    </p:tnLst>
-  </p:timing>
 </p:sld>
 </file>
 
@@ -3489,34 +3549,80 @@
                 <a:latin typeface="微軟正黑體" pitchFamily="34" charset="-120"/>
                 <a:ea typeface="微軟正黑體" pitchFamily="34" charset="-120"/>
               </a:rPr>
-              <a:t>我要安靜 </a:t>
-            </a:r>
-            <a:r>
-              <a:rPr lang="zh-TW" altLang="en-US" sz="4800" b="1" dirty="0" smtClean="0">
+              <a:t>我要安靜  知祢是神</a:t>
+            </a:r>
+          </a:p>
+        </p:txBody>
+      </p:sp>
+      <p:sp>
+        <p:nvSpPr>
+          <p:cNvPr id="3" name="TextBox 2">
+            <a:extLst>
+              <a:ext uri="{FF2B5EF4-FFF2-40B4-BE49-F238E27FC236}">
+                <a16:creationId xmlns:a16="http://schemas.microsoft.com/office/drawing/2014/main" id="{523C70AA-986C-289F-4EA2-42E89C6E1503}"/>
+              </a:ext>
+            </a:extLst>
+          </p:cNvPr>
+          <p:cNvSpPr txBox="1"/>
+          <p:nvPr/>
+        </p:nvSpPr>
+        <p:spPr>
+          <a:xfrm>
+            <a:off x="0" y="3867894"/>
+            <a:ext cx="9144000" cy="523220"/>
+          </a:xfrm>
+          <a:prstGeom prst="rect">
+            <a:avLst/>
+          </a:prstGeom>
+          <a:noFill/>
+        </p:spPr>
+        <p:txBody>
+          <a:bodyPr wrap="square" rtlCol="0">
+            <a:spAutoFit/>
+          </a:bodyPr>
+          <a:lstStyle/>
+          <a:p>
+            <a:pPr algn="ctr"/>
+            <a:r>
+              <a:rPr lang="en-US" sz="2800" b="1" dirty="0">
                 <a:solidFill>
                   <a:srgbClr val="000066"/>
                 </a:solidFill>
-                <a:latin typeface="微軟正黑體" pitchFamily="34" charset="-120"/>
-                <a:ea typeface="微軟正黑體" pitchFamily="34" charset="-120"/>
+                <a:effectLst/>
+                <a:latin typeface="Microsoft JhengHei" panose="020B0604030504040204" pitchFamily="34" charset="-120"/>
+                <a:ea typeface="Microsoft JhengHei" panose="020B0604030504040204" pitchFamily="34" charset="-120"/>
               </a:rPr>
-              <a:t> 知</a:t>
-            </a:r>
-            <a:r>
-              <a:rPr lang="zh-TW" altLang="en-US" sz="4800" b="1" dirty="0">
+              <a:t>( </a:t>
+            </a:r>
+            <a:r>
+              <a:rPr lang="zh-CN" altLang="en-US" sz="2800" b="1" dirty="0">
                 <a:solidFill>
                   <a:srgbClr val="000066"/>
                 </a:solidFill>
-                <a:latin typeface="微軟正黑體" pitchFamily="34" charset="-120"/>
-                <a:ea typeface="微軟正黑體" pitchFamily="34" charset="-120"/>
+                <a:effectLst/>
+                <a:latin typeface="Microsoft JhengHei" panose="020B0604030504040204" pitchFamily="34" charset="-120"/>
+                <a:ea typeface="Microsoft JhengHei" panose="020B0604030504040204" pitchFamily="34" charset="-120"/>
               </a:rPr>
-              <a:t>祢是神</a:t>
-            </a:r>
-            <a:endParaRPr lang="zh-TW" altLang="en-US" sz="4800" b="1" dirty="0">
+              <a:t>副歌</a:t>
+            </a:r>
+            <a:r>
+              <a:rPr lang="en-US" sz="2800" b="1" dirty="0">
+                <a:solidFill>
+                  <a:srgbClr val="000066"/>
+                </a:solidFill>
+                <a:effectLst/>
+                <a:latin typeface="Microsoft JhengHei" panose="020B0604030504040204" pitchFamily="34" charset="-120"/>
+                <a:ea typeface="Microsoft JhengHei" panose="020B0604030504040204" pitchFamily="34" charset="-120"/>
+              </a:rPr>
+              <a:t> )</a:t>
+            </a:r>
+            <a:endParaRPr lang="vi-VN" sz="2800" b="1" dirty="0">
               <a:solidFill>
                 <a:srgbClr val="000066"/>
               </a:solidFill>
-              <a:latin typeface="微軟正黑體" pitchFamily="34" charset="-120"/>
-              <a:ea typeface="微軟正黑體" pitchFamily="34" charset="-120"/>
+              <a:effectLst/>
+              <a:latin typeface="Microsoft JhengHei" panose="020B0604030504040204" pitchFamily="34" charset="-120"/>
+              <a:ea typeface="Microsoft JhengHei" panose="020B0604030504040204" pitchFamily="34" charset="-120"/>
             </a:endParaRPr>
           </a:p>
         </p:txBody>
@@ -3531,13 +3637,6 @@
   <p:clrMapOvr>
     <a:masterClrMapping/>
   </p:clrMapOvr>
-  <p:timing>
-    <p:tnLst>
-      <p:par>
-        <p:cTn id="1" dur="indefinite" restart="never" nodeType="tmRoot"/>
-      </p:par>
-    </p:tnLst>
-  </p:timing>
 </p:sld>
 </file>
 
@@ -3591,27 +3690,7 @@
                 <a:latin typeface="微軟正黑體" pitchFamily="34" charset="-120"/>
                 <a:ea typeface="微軟正黑體" pitchFamily="34" charset="-120"/>
               </a:rPr>
-              <a:t>我靈安</a:t>
-            </a:r>
-            <a:r>
-              <a:rPr lang="zh-TW" altLang="en-US" sz="4800" b="1" dirty="0" smtClean="0">
-                <a:solidFill>
-                  <a:srgbClr val="000066"/>
-                </a:solidFill>
-                <a:latin typeface="微軟正黑體" pitchFamily="34" charset="-120"/>
-                <a:ea typeface="微軟正黑體" pitchFamily="34" charset="-120"/>
-              </a:rPr>
-              <a:t>息  </a:t>
-            </a:r>
-            <a:r>
-              <a:rPr lang="zh-TW" altLang="en-US" sz="4800" b="1" dirty="0">
-                <a:solidFill>
-                  <a:srgbClr val="000066"/>
-                </a:solidFill>
-                <a:latin typeface="微軟正黑體" pitchFamily="34" charset="-120"/>
-                <a:ea typeface="微軟正黑體" pitchFamily="34" charset="-120"/>
-              </a:rPr>
-              <a:t>在基督裡</a:t>
+              <a:t>我靈安息  在基督裡</a:t>
             </a:r>
             <a:endParaRPr lang="en-US" altLang="zh-TW" sz="4800" b="1" dirty="0">
               <a:solidFill>
@@ -3636,7 +3715,7 @@
               <a:t>祢大能 </a:t>
             </a:r>
             <a:r>
-              <a:rPr lang="en-US" altLang="zh-TW" sz="4800" b="1" dirty="0" smtClean="0">
+              <a:rPr lang="en-US" altLang="zh-TW" sz="4800" b="1" dirty="0">
                 <a:solidFill>
                   <a:srgbClr val="000066"/>
                 </a:solidFill>
@@ -3646,31 +3725,98 @@
               <a:t> </a:t>
             </a:r>
             <a:r>
-              <a:rPr lang="zh-TW" altLang="en-US" sz="4800" b="1" dirty="0" smtClean="0">
+              <a:rPr lang="zh-TW" altLang="en-US" sz="4800" b="1" dirty="0">
                 <a:solidFill>
                   <a:srgbClr val="000066"/>
                 </a:solidFill>
                 <a:latin typeface="微軟正黑體" pitchFamily="34" charset="-120"/>
                 <a:ea typeface="微軟正黑體" pitchFamily="34" charset="-120"/>
               </a:rPr>
-              <a:t>使</a:t>
-            </a:r>
-            <a:r>
-              <a:rPr lang="zh-TW" altLang="en-US" sz="4800" b="1" dirty="0">
+              <a:t>使我安然信靠</a:t>
+            </a:r>
+          </a:p>
+        </p:txBody>
+      </p:sp>
+      <p:sp>
+        <p:nvSpPr>
+          <p:cNvPr id="2" name="TextBox 1">
+            <a:extLst>
+              <a:ext uri="{FF2B5EF4-FFF2-40B4-BE49-F238E27FC236}">
+                <a16:creationId xmlns:a16="http://schemas.microsoft.com/office/drawing/2014/main" id="{47666ECE-C511-A07E-FDC7-F94B51734572}"/>
+              </a:ext>
+            </a:extLst>
+          </p:cNvPr>
+          <p:cNvSpPr txBox="1"/>
+          <p:nvPr/>
+        </p:nvSpPr>
+        <p:spPr>
+          <a:xfrm>
+            <a:off x="0" y="3867894"/>
+            <a:ext cx="9144000" cy="523220"/>
+          </a:xfrm>
+          <a:prstGeom prst="rect">
+            <a:avLst/>
+          </a:prstGeom>
+          <a:noFill/>
+        </p:spPr>
+        <p:txBody>
+          <a:bodyPr wrap="square" rtlCol="0">
+            <a:spAutoFit/>
+          </a:bodyPr>
+          <a:lstStyle/>
+          <a:p>
+            <a:pPr algn="ctr"/>
+            <a:r>
+              <a:rPr lang="en-US" sz="2800" b="1" dirty="0">
                 <a:solidFill>
                   <a:srgbClr val="000066"/>
                 </a:solidFill>
-                <a:latin typeface="微軟正黑體" pitchFamily="34" charset="-120"/>
-                <a:ea typeface="微軟正黑體" pitchFamily="34" charset="-120"/>
+                <a:effectLst/>
+                <a:latin typeface="Microsoft JhengHei" panose="020B0604030504040204" pitchFamily="34" charset="-120"/>
+                <a:ea typeface="Microsoft JhengHei" panose="020B0604030504040204" pitchFamily="34" charset="-120"/>
               </a:rPr>
-              <a:t>我安然信靠</a:t>
-            </a:r>
-            <a:endParaRPr lang="zh-TW" altLang="en-US" sz="4800" b="1" dirty="0">
+              <a:t>( </a:t>
+            </a:r>
+            <a:r>
+              <a:rPr lang="zh-CN" altLang="en-US" sz="2800" b="1" dirty="0">
+                <a:solidFill>
+                  <a:srgbClr val="000066"/>
+                </a:solidFill>
+                <a:effectLst/>
+                <a:latin typeface="Microsoft JhengHei" panose="020B0604030504040204" pitchFamily="34" charset="-120"/>
+                <a:ea typeface="Microsoft JhengHei" panose="020B0604030504040204" pitchFamily="34" charset="-120"/>
+              </a:rPr>
+              <a:t>正歌 </a:t>
+            </a:r>
+            <a:r>
+              <a:rPr lang="en-US" altLang="zh-CN" sz="2800" b="1" dirty="0">
+                <a:solidFill>
+                  <a:srgbClr val="000066"/>
+                </a:solidFill>
+                <a:effectLst/>
+                <a:latin typeface="Microsoft JhengHei" panose="020B0604030504040204" pitchFamily="34" charset="-120"/>
+                <a:ea typeface="Microsoft JhengHei" panose="020B0604030504040204" pitchFamily="34" charset="-120"/>
+              </a:rPr>
+              <a:t>2</a:t>
+            </a:r>
+            <a:r>
+              <a:rPr lang="en-US" sz="2800" b="1" dirty="0">
+                <a:solidFill>
+                  <a:srgbClr val="000066"/>
+                </a:solidFill>
+                <a:effectLst/>
+                <a:latin typeface="Microsoft JhengHei" panose="020B0604030504040204" pitchFamily="34" charset="-120"/>
+                <a:ea typeface="Microsoft JhengHei" panose="020B0604030504040204" pitchFamily="34" charset="-120"/>
+              </a:rPr>
+              <a:t> )</a:t>
+            </a:r>
+            <a:endParaRPr lang="vi-VN" sz="2800" b="1" dirty="0">
               <a:solidFill>
                 <a:srgbClr val="000066"/>
               </a:solidFill>
-              <a:latin typeface="微軟正黑體" pitchFamily="34" charset="-120"/>
-              <a:ea typeface="微軟正黑體" pitchFamily="34" charset="-120"/>
+              <a:effectLst/>
+              <a:latin typeface="Microsoft JhengHei" panose="020B0604030504040204" pitchFamily="34" charset="-120"/>
+              <a:ea typeface="Microsoft JhengHei" panose="020B0604030504040204" pitchFamily="34" charset="-120"/>
             </a:endParaRPr>
           </a:p>
         </p:txBody>
@@ -3685,13 +3831,6 @@
   <p:clrMapOvr>
     <a:masterClrMapping/>
   </p:clrMapOvr>
-  <p:timing>
-    <p:tnLst>
-      <p:par>
-        <p:cTn id="1" dur="indefinite" restart="never" nodeType="tmRoot"/>
-      </p:par>
-    </p:tnLst>
-  </p:timing>
 </p:sld>
 </file>
 
@@ -3779,6 +3918,79 @@
           </a:p>
         </p:txBody>
       </p:sp>
+      <p:sp>
+        <p:nvSpPr>
+          <p:cNvPr id="2" name="TextBox 1">
+            <a:extLst>
+              <a:ext uri="{FF2B5EF4-FFF2-40B4-BE49-F238E27FC236}">
+                <a16:creationId xmlns:a16="http://schemas.microsoft.com/office/drawing/2014/main" id="{259196AE-71F5-C78F-A79E-7C837D9B7D51}"/>
+              </a:ext>
+            </a:extLst>
+          </p:cNvPr>
+          <p:cNvSpPr txBox="1"/>
+          <p:nvPr/>
+        </p:nvSpPr>
+        <p:spPr>
+          <a:xfrm>
+            <a:off x="0" y="3867894"/>
+            <a:ext cx="9144000" cy="523220"/>
+          </a:xfrm>
+          <a:prstGeom prst="rect">
+            <a:avLst/>
+          </a:prstGeom>
+          <a:noFill/>
+        </p:spPr>
+        <p:txBody>
+          <a:bodyPr wrap="square" rtlCol="0">
+            <a:spAutoFit/>
+          </a:bodyPr>
+          <a:lstStyle/>
+          <a:p>
+            <a:pPr algn="ctr"/>
+            <a:r>
+              <a:rPr lang="en-US" sz="2800" b="1" dirty="0">
+                <a:solidFill>
+                  <a:srgbClr val="000066"/>
+                </a:solidFill>
+                <a:effectLst/>
+                <a:latin typeface="Microsoft JhengHei" panose="020B0604030504040204" pitchFamily="34" charset="-120"/>
+                <a:ea typeface="Microsoft JhengHei" panose="020B0604030504040204" pitchFamily="34" charset="-120"/>
+              </a:rPr>
+              <a:t>( </a:t>
+            </a:r>
+            <a:r>
+              <a:rPr lang="zh-CN" altLang="en-US" sz="2800" b="1" dirty="0">
+                <a:solidFill>
+                  <a:srgbClr val="000066"/>
+                </a:solidFill>
+                <a:effectLst/>
+                <a:latin typeface="Microsoft JhengHei" panose="020B0604030504040204" pitchFamily="34" charset="-120"/>
+                <a:ea typeface="Microsoft JhengHei" panose="020B0604030504040204" pitchFamily="34" charset="-120"/>
+              </a:rPr>
+              <a:t>副歌</a:t>
+            </a:r>
+            <a:r>
+              <a:rPr lang="en-US" sz="2800" b="1" dirty="0">
+                <a:solidFill>
+                  <a:srgbClr val="000066"/>
+                </a:solidFill>
+                <a:effectLst/>
+                <a:latin typeface="Microsoft JhengHei" panose="020B0604030504040204" pitchFamily="34" charset="-120"/>
+                <a:ea typeface="Microsoft JhengHei" panose="020B0604030504040204" pitchFamily="34" charset="-120"/>
+              </a:rPr>
+              <a:t> )</a:t>
+            </a:r>
+            <a:endParaRPr lang="vi-VN" sz="2800" b="1" dirty="0">
+              <a:solidFill>
+                <a:srgbClr val="000066"/>
+              </a:solidFill>
+              <a:effectLst/>
+              <a:latin typeface="Microsoft JhengHei" panose="020B0604030504040204" pitchFamily="34" charset="-120"/>
+              <a:ea typeface="Microsoft JhengHei" panose="020B0604030504040204" pitchFamily="34" charset="-120"/>
+            </a:endParaRPr>
+          </a:p>
+        </p:txBody>
+      </p:sp>
     </p:spTree>
     <p:extLst>
       <p:ext uri="{BB962C8B-B14F-4D97-AF65-F5344CB8AC3E}">
@@ -3789,13 +4001,6 @@
   <p:clrMapOvr>
     <a:masterClrMapping/>
   </p:clrMapOvr>
-  <p:timing>
-    <p:tnLst>
-      <p:par>
-        <p:cTn id="1" dur="indefinite" restart="never" nodeType="tmRoot"/>
-      </p:par>
-    </p:tnLst>
-  </p:timing>
 </p:sld>
 </file>
 
@@ -3871,34 +4076,80 @@
                 <a:latin typeface="微軟正黑體" pitchFamily="34" charset="-120"/>
                 <a:ea typeface="微軟正黑體" pitchFamily="34" charset="-120"/>
               </a:rPr>
-              <a:t>我要安靜 </a:t>
-            </a:r>
-            <a:r>
-              <a:rPr lang="zh-TW" altLang="en-US" sz="4800" b="1" dirty="0" smtClean="0">
+              <a:t>我要安靜  知祢是神</a:t>
+            </a:r>
+          </a:p>
+        </p:txBody>
+      </p:sp>
+      <p:sp>
+        <p:nvSpPr>
+          <p:cNvPr id="2" name="TextBox 1">
+            <a:extLst>
+              <a:ext uri="{FF2B5EF4-FFF2-40B4-BE49-F238E27FC236}">
+                <a16:creationId xmlns:a16="http://schemas.microsoft.com/office/drawing/2014/main" id="{52E59917-D37E-99CB-8D58-3001D58571F3}"/>
+              </a:ext>
+            </a:extLst>
+          </p:cNvPr>
+          <p:cNvSpPr txBox="1"/>
+          <p:nvPr/>
+        </p:nvSpPr>
+        <p:spPr>
+          <a:xfrm>
+            <a:off x="0" y="3867894"/>
+            <a:ext cx="9144000" cy="523220"/>
+          </a:xfrm>
+          <a:prstGeom prst="rect">
+            <a:avLst/>
+          </a:prstGeom>
+          <a:noFill/>
+        </p:spPr>
+        <p:txBody>
+          <a:bodyPr wrap="square" rtlCol="0">
+            <a:spAutoFit/>
+          </a:bodyPr>
+          <a:lstStyle/>
+          <a:p>
+            <a:pPr algn="ctr"/>
+            <a:r>
+              <a:rPr lang="en-US" sz="2800" b="1" dirty="0">
                 <a:solidFill>
                   <a:srgbClr val="000066"/>
                 </a:solidFill>
-                <a:latin typeface="微軟正黑體" pitchFamily="34" charset="-120"/>
-                <a:ea typeface="微軟正黑體" pitchFamily="34" charset="-120"/>
+                <a:effectLst/>
+                <a:latin typeface="Microsoft JhengHei" panose="020B0604030504040204" pitchFamily="34" charset="-120"/>
+                <a:ea typeface="Microsoft JhengHei" panose="020B0604030504040204" pitchFamily="34" charset="-120"/>
               </a:rPr>
-              <a:t> 知</a:t>
-            </a:r>
-            <a:r>
-              <a:rPr lang="zh-TW" altLang="en-US" sz="4800" b="1" dirty="0">
+              <a:t>( </a:t>
+            </a:r>
+            <a:r>
+              <a:rPr lang="zh-CN" altLang="en-US" sz="2800" b="1" dirty="0">
                 <a:solidFill>
                   <a:srgbClr val="000066"/>
                 </a:solidFill>
-                <a:latin typeface="微軟正黑體" pitchFamily="34" charset="-120"/>
-                <a:ea typeface="微軟正黑體" pitchFamily="34" charset="-120"/>
+                <a:effectLst/>
+                <a:latin typeface="Microsoft JhengHei" panose="020B0604030504040204" pitchFamily="34" charset="-120"/>
+                <a:ea typeface="Microsoft JhengHei" panose="020B0604030504040204" pitchFamily="34" charset="-120"/>
               </a:rPr>
-              <a:t>祢是神</a:t>
-            </a:r>
-            <a:endParaRPr lang="zh-TW" altLang="en-US" sz="4800" b="1" dirty="0">
+              <a:t>副歌</a:t>
+            </a:r>
+            <a:r>
+              <a:rPr lang="en-US" sz="2800" b="1" dirty="0">
+                <a:solidFill>
+                  <a:srgbClr val="000066"/>
+                </a:solidFill>
+                <a:effectLst/>
+                <a:latin typeface="Microsoft JhengHei" panose="020B0604030504040204" pitchFamily="34" charset="-120"/>
+                <a:ea typeface="Microsoft JhengHei" panose="020B0604030504040204" pitchFamily="34" charset="-120"/>
+              </a:rPr>
+              <a:t> )</a:t>
+            </a:r>
+            <a:endParaRPr lang="vi-VN" sz="2800" b="1" dirty="0">
               <a:solidFill>
                 <a:srgbClr val="000066"/>
               </a:solidFill>
-              <a:latin typeface="微軟正黑體" pitchFamily="34" charset="-120"/>
-              <a:ea typeface="微軟正黑體" pitchFamily="34" charset="-120"/>
+              <a:effectLst/>
+              <a:latin typeface="Microsoft JhengHei" panose="020B0604030504040204" pitchFamily="34" charset="-120"/>
+              <a:ea typeface="Microsoft JhengHei" panose="020B0604030504040204" pitchFamily="34" charset="-120"/>
             </a:endParaRPr>
           </a:p>
         </p:txBody>
@@ -3913,13 +4164,6 @@
   <p:clrMapOvr>
     <a:masterClrMapping/>
   </p:clrMapOvr>
-  <p:timing>
-    <p:tnLst>
-      <p:par>
-        <p:cTn id="1" dur="indefinite" restart="never" nodeType="tmRoot"/>
-      </p:par>
-    </p:tnLst>
-  </p:timing>
 </p:sld>
 </file>
 
